--- a/Lectures/BI3010 Lecture 5.5 Interpreting LM with a categorical predictor.pptx
+++ b/Lectures/BI3010 Lecture 5.5 Interpreting LM with a categorical predictor.pptx
@@ -473,7 +473,7 @@
           <a:p>
             <a:fld id="{D8644561-F434-46E9-9D5F-467389065464}" type="datetimeFigureOut">
               <a:rPr lang="en-GB" smtClean="0"/>
-              <a:t>06/09/2024</a:t>
+              <a:t>07/10/2024</a:t>
             </a:fld>
             <a:endParaRPr lang="en-GB"/>
           </a:p>
@@ -683,7 +683,7 @@
           <a:p>
             <a:fld id="{D8644561-F434-46E9-9D5F-467389065464}" type="datetimeFigureOut">
               <a:rPr lang="en-GB" smtClean="0"/>
-              <a:t>06/09/2024</a:t>
+              <a:t>07/10/2024</a:t>
             </a:fld>
             <a:endParaRPr lang="en-GB"/>
           </a:p>
@@ -905,7 +905,7 @@
           <a:p>
             <a:fld id="{D8644561-F434-46E9-9D5F-467389065464}" type="datetimeFigureOut">
               <a:rPr lang="en-GB" smtClean="0"/>
-              <a:t>06/09/2024</a:t>
+              <a:t>07/10/2024</a:t>
             </a:fld>
             <a:endParaRPr lang="en-GB"/>
           </a:p>
@@ -1844,7 +1844,7 @@
           <a:p>
             <a:fld id="{D8644561-F434-46E9-9D5F-467389065464}" type="datetimeFigureOut">
               <a:rPr lang="en-GB" smtClean="0"/>
-              <a:t>06/09/2024</a:t>
+              <a:t>07/10/2024</a:t>
             </a:fld>
             <a:endParaRPr lang="en-GB"/>
           </a:p>
@@ -1986,7 +1986,7 @@
           <a:p>
             <a:fld id="{D8644561-F434-46E9-9D5F-467389065464}" type="datetimeFigureOut">
               <a:rPr lang="en-GB" smtClean="0"/>
-              <a:t>06/09/2024</a:t>
+              <a:t>07/10/2024</a:t>
             </a:fld>
             <a:endParaRPr lang="en-GB"/>
           </a:p>
@@ -2099,7 +2099,7 @@
           <a:p>
             <a:fld id="{D8644561-F434-46E9-9D5F-467389065464}" type="datetimeFigureOut">
               <a:rPr lang="en-GB" smtClean="0"/>
-              <a:t>06/09/2024</a:t>
+              <a:t>07/10/2024</a:t>
             </a:fld>
             <a:endParaRPr lang="en-GB"/>
           </a:p>
@@ -2412,7 +2412,7 @@
           <a:p>
             <a:fld id="{D8644561-F434-46E9-9D5F-467389065464}" type="datetimeFigureOut">
               <a:rPr lang="en-GB" smtClean="0"/>
-              <a:t>06/09/2024</a:t>
+              <a:t>07/10/2024</a:t>
             </a:fld>
             <a:endParaRPr lang="en-GB"/>
           </a:p>
@@ -2705,7 +2705,7 @@
           <a:p>
             <a:fld id="{D8644561-F434-46E9-9D5F-467389065464}" type="datetimeFigureOut">
               <a:rPr lang="en-GB" smtClean="0"/>
-              <a:t>06/09/2024</a:t>
+              <a:t>07/10/2024</a:t>
             </a:fld>
             <a:endParaRPr lang="en-GB"/>
           </a:p>
@@ -2948,7 +2948,7 @@
           <a:p>
             <a:fld id="{D8644561-F434-46E9-9D5F-467389065464}" type="datetimeFigureOut">
               <a:rPr lang="en-GB" smtClean="0"/>
-              <a:t>06/09/2024</a:t>
+              <a:t>07/10/2024</a:t>
             </a:fld>
             <a:endParaRPr lang="en-GB"/>
           </a:p>
@@ -3435,13 +3435,13 @@
   <p:clrMapOvr>
     <a:masterClrMapping/>
   </p:clrMapOvr>
-  <mc:AlternateContent xmlns:mc="http://schemas.openxmlformats.org/markup-compatibility/2006">
-    <mc:Choice xmlns:p14="http://schemas.microsoft.com/office/powerpoint/2010/main" Requires="p14">
+  <mc:AlternateContent xmlns:mc="http://schemas.openxmlformats.org/markup-compatibility/2006" xmlns:p14="http://schemas.microsoft.com/office/powerpoint/2010/main">
+    <mc:Choice Requires="p14">
       <p:transition spd="med" p14:dur="700">
         <p:fade/>
       </p:transition>
     </mc:Choice>
-    <mc:Fallback>
+    <mc:Fallback xmlns="">
       <p:transition spd="med">
         <p:fade/>
       </p:transition>
@@ -3741,13 +3741,13 @@
   <p:clrMapOvr>
     <a:masterClrMapping/>
   </p:clrMapOvr>
-  <mc:AlternateContent xmlns:mc="http://schemas.openxmlformats.org/markup-compatibility/2006">
-    <mc:Choice xmlns:p14="http://schemas.microsoft.com/office/powerpoint/2010/main" Requires="p14">
+  <mc:AlternateContent xmlns:mc="http://schemas.openxmlformats.org/markup-compatibility/2006" xmlns:p14="http://schemas.microsoft.com/office/powerpoint/2010/main">
+    <mc:Choice Requires="p14">
       <p:transition spd="med" p14:dur="700">
         <p:fade/>
       </p:transition>
     </mc:Choice>
-    <mc:Fallback>
+    <mc:Fallback xmlns="">
       <p:transition spd="med">
         <p:fade/>
       </p:transition>
@@ -5391,13 +5391,13 @@
   <p:clrMapOvr>
     <a:masterClrMapping/>
   </p:clrMapOvr>
-  <mc:AlternateContent xmlns:mc="http://schemas.openxmlformats.org/markup-compatibility/2006">
-    <mc:Choice xmlns:p14="http://schemas.microsoft.com/office/powerpoint/2010/main" Requires="p14">
+  <mc:AlternateContent xmlns:mc="http://schemas.openxmlformats.org/markup-compatibility/2006" xmlns:p14="http://schemas.microsoft.com/office/powerpoint/2010/main">
+    <mc:Choice Requires="p14">
       <p:transition spd="med" p14:dur="700">
         <p:fade/>
       </p:transition>
     </mc:Choice>
-    <mc:Fallback>
+    <mc:Fallback xmlns="">
       <p:transition spd="med">
         <p:fade/>
       </p:transition>
@@ -6175,13 +6175,13 @@
   <p:clrMapOvr>
     <a:masterClrMapping/>
   </p:clrMapOvr>
-  <mc:AlternateContent xmlns:mc="http://schemas.openxmlformats.org/markup-compatibility/2006">
-    <mc:Choice xmlns:p14="http://schemas.microsoft.com/office/powerpoint/2010/main" Requires="p14">
+  <mc:AlternateContent xmlns:mc="http://schemas.openxmlformats.org/markup-compatibility/2006" xmlns:p14="http://schemas.microsoft.com/office/powerpoint/2010/main">
+    <mc:Choice Requires="p14">
       <p:transition spd="med" p14:dur="700">
         <p:fade/>
       </p:transition>
     </mc:Choice>
-    <mc:Fallback>
+    <mc:Fallback xmlns="">
       <p:transition spd="med">
         <p:fade/>
       </p:transition>
@@ -6245,13 +6245,13 @@
   <p:clrMapOvr>
     <a:masterClrMapping/>
   </p:clrMapOvr>
-  <mc:AlternateContent xmlns:mc="http://schemas.openxmlformats.org/markup-compatibility/2006">
-    <mc:Choice xmlns:p14="http://schemas.microsoft.com/office/powerpoint/2010/main" Requires="p14">
+  <mc:AlternateContent xmlns:mc="http://schemas.openxmlformats.org/markup-compatibility/2006" xmlns:p14="http://schemas.microsoft.com/office/powerpoint/2010/main">
+    <mc:Choice Requires="p14">
       <p:transition spd="med" p14:dur="700">
         <p:fade/>
       </p:transition>
     </mc:Choice>
-    <mc:Fallback>
+    <mc:Fallback xmlns="">
       <p:transition spd="med">
         <p:fade/>
       </p:transition>
@@ -7282,13 +7282,13 @@
   <p:clrMapOvr>
     <a:masterClrMapping/>
   </p:clrMapOvr>
-  <mc:AlternateContent xmlns:mc="http://schemas.openxmlformats.org/markup-compatibility/2006">
-    <mc:Choice xmlns:p14="http://schemas.microsoft.com/office/powerpoint/2010/main" Requires="p14">
+  <mc:AlternateContent xmlns:mc="http://schemas.openxmlformats.org/markup-compatibility/2006" xmlns:p14="http://schemas.microsoft.com/office/powerpoint/2010/main">
+    <mc:Choice Requires="p14">
       <p:transition spd="med" p14:dur="700">
         <p:fade/>
       </p:transition>
     </mc:Choice>
-    <mc:Fallback>
+    <mc:Fallback xmlns="">
       <p:transition spd="med">
         <p:fade/>
       </p:transition>
@@ -7860,13 +7860,13 @@
   <p:clrMapOvr>
     <a:masterClrMapping/>
   </p:clrMapOvr>
-  <mc:AlternateContent xmlns:mc="http://schemas.openxmlformats.org/markup-compatibility/2006">
-    <mc:Choice xmlns:p14="http://schemas.microsoft.com/office/powerpoint/2010/main" Requires="p14">
+  <mc:AlternateContent xmlns:mc="http://schemas.openxmlformats.org/markup-compatibility/2006" xmlns:p14="http://schemas.microsoft.com/office/powerpoint/2010/main">
+    <mc:Choice Requires="p14">
       <p:transition spd="med" p14:dur="700">
         <p:fade/>
       </p:transition>
     </mc:Choice>
-    <mc:Fallback>
+    <mc:Fallback xmlns="">
       <p:transition spd="med">
         <p:fade/>
       </p:transition>
@@ -8179,13 +8179,13 @@
   <p:clrMapOvr>
     <a:masterClrMapping/>
   </p:clrMapOvr>
-  <mc:AlternateContent xmlns:mc="http://schemas.openxmlformats.org/markup-compatibility/2006">
-    <mc:Choice xmlns:p14="http://schemas.microsoft.com/office/powerpoint/2010/main" Requires="p14">
+  <mc:AlternateContent xmlns:mc="http://schemas.openxmlformats.org/markup-compatibility/2006" xmlns:p14="http://schemas.microsoft.com/office/powerpoint/2010/main">
+    <mc:Choice Requires="p14">
       <p:transition spd="med" p14:dur="700">
         <p:fade/>
       </p:transition>
     </mc:Choice>
-    <mc:Fallback>
+    <mc:Fallback xmlns="">
       <p:transition spd="med">
         <p:fade/>
       </p:transition>
@@ -8951,8 +8951,8 @@
           </p:spPr>
         </p:pic>
       </p:grpSp>
-      <mc:AlternateContent xmlns:mc="http://schemas.openxmlformats.org/markup-compatibility/2006" xmlns:a14="http://schemas.microsoft.com/office/drawing/2010/main">
-        <mc:Choice Requires="a14">
+      <mc:AlternateContent xmlns:mc="http://schemas.openxmlformats.org/markup-compatibility/2006">
+        <mc:Choice xmlns:a14="http://schemas.microsoft.com/office/drawing/2010/main" Requires="a14">
           <p:sp>
             <p:nvSpPr>
               <p:cNvPr id="12" name="Content Placeholder 2">
@@ -9537,7 +9537,7 @@
             </p:txBody>
           </p:sp>
         </mc:Choice>
-        <mc:Fallback xmlns="">
+        <mc:Fallback>
           <p:sp>
             <p:nvSpPr>
               <p:cNvPr id="12" name="Content Placeholder 2">
@@ -9563,7 +9563,7 @@
               <a:blipFill>
                 <a:blip r:embed="rId4"/>
                 <a:stretch>
-                  <a:fillRect l="-647" t="-11304" b="-6087"/>
+                  <a:fillRect l="-746" t="-11304" b="-36087"/>
                 </a:stretch>
               </a:blipFill>
             </p:spPr>
@@ -9592,13 +9592,13 @@
   <p:clrMapOvr>
     <a:masterClrMapping/>
   </p:clrMapOvr>
-  <mc:AlternateContent xmlns:mc="http://schemas.openxmlformats.org/markup-compatibility/2006">
-    <mc:Choice xmlns:p14="http://schemas.microsoft.com/office/powerpoint/2010/main" Requires="p14">
+  <mc:AlternateContent xmlns:mc="http://schemas.openxmlformats.org/markup-compatibility/2006" xmlns:p14="http://schemas.microsoft.com/office/powerpoint/2010/main">
+    <mc:Choice Requires="p14">
       <p:transition spd="med" p14:dur="700">
         <p:fade/>
       </p:transition>
     </mc:Choice>
-    <mc:Fallback>
+    <mc:Fallback xmlns="">
       <p:transition spd="med">
         <p:fade/>
       </p:transition>
@@ -10422,13 +10422,13 @@
   <p:clrMapOvr>
     <a:masterClrMapping/>
   </p:clrMapOvr>
-  <mc:AlternateContent xmlns:mc="http://schemas.openxmlformats.org/markup-compatibility/2006">
-    <mc:Choice xmlns:p14="http://schemas.microsoft.com/office/powerpoint/2010/main" Requires="p14">
+  <mc:AlternateContent xmlns:mc="http://schemas.openxmlformats.org/markup-compatibility/2006" xmlns:p14="http://schemas.microsoft.com/office/powerpoint/2010/main">
+    <mc:Choice Requires="p14">
       <p:transition spd="med" p14:dur="700">
         <p:fade/>
       </p:transition>
     </mc:Choice>
-    <mc:Fallback>
+    <mc:Fallback xmlns="">
       <p:transition spd="med">
         <p:fade/>
       </p:transition>
@@ -11293,13 +11293,13 @@
   <p:clrMapOvr>
     <a:masterClrMapping/>
   </p:clrMapOvr>
-  <mc:AlternateContent xmlns:mc="http://schemas.openxmlformats.org/markup-compatibility/2006">
-    <mc:Choice xmlns:p14="http://schemas.microsoft.com/office/powerpoint/2010/main" Requires="p14">
+  <mc:AlternateContent xmlns:mc="http://schemas.openxmlformats.org/markup-compatibility/2006" xmlns:p14="http://schemas.microsoft.com/office/powerpoint/2010/main">
+    <mc:Choice Requires="p14">
       <p:transition spd="med" p14:dur="700">
         <p:fade/>
       </p:transition>
     </mc:Choice>
-    <mc:Fallback>
+    <mc:Fallback xmlns="">
       <p:transition spd="med">
         <p:fade/>
       </p:transition>
@@ -11563,13 +11563,13 @@
   <p:clrMapOvr>
     <a:masterClrMapping/>
   </p:clrMapOvr>
-  <mc:AlternateContent xmlns:mc="http://schemas.openxmlformats.org/markup-compatibility/2006">
-    <mc:Choice xmlns:p14="http://schemas.microsoft.com/office/powerpoint/2010/main" Requires="p14">
+  <mc:AlternateContent xmlns:mc="http://schemas.openxmlformats.org/markup-compatibility/2006" xmlns:p14="http://schemas.microsoft.com/office/powerpoint/2010/main">
+    <mc:Choice Requires="p14">
       <p:transition spd="med" p14:dur="700">
         <p:fade/>
       </p:transition>
     </mc:Choice>
-    <mc:Fallback>
+    <mc:Fallback xmlns="">
       <p:transition spd="med">
         <p:fade/>
       </p:transition>
@@ -12093,13 +12093,13 @@
   <p:clrMapOvr>
     <a:masterClrMapping/>
   </p:clrMapOvr>
-  <mc:AlternateContent xmlns:mc="http://schemas.openxmlformats.org/markup-compatibility/2006">
-    <mc:Choice xmlns:p14="http://schemas.microsoft.com/office/powerpoint/2010/main" Requires="p14">
+  <mc:AlternateContent xmlns:mc="http://schemas.openxmlformats.org/markup-compatibility/2006" xmlns:p14="http://schemas.microsoft.com/office/powerpoint/2010/main">
+    <mc:Choice Requires="p14">
       <p:transition spd="med" p14:dur="700">
         <p:fade/>
       </p:transition>
     </mc:Choice>
-    <mc:Fallback>
+    <mc:Fallback xmlns="">
       <p:transition spd="med">
         <p:fade/>
       </p:transition>
@@ -12480,13 +12480,13 @@
   <p:clrMapOvr>
     <a:masterClrMapping/>
   </p:clrMapOvr>
-  <mc:AlternateContent xmlns:mc="http://schemas.openxmlformats.org/markup-compatibility/2006">
-    <mc:Choice xmlns:p14="http://schemas.microsoft.com/office/powerpoint/2010/main" Requires="p14">
+  <mc:AlternateContent xmlns:mc="http://schemas.openxmlformats.org/markup-compatibility/2006" xmlns:p14="http://schemas.microsoft.com/office/powerpoint/2010/main">
+    <mc:Choice Requires="p14">
       <p:transition spd="med" p14:dur="700">
         <p:fade/>
       </p:transition>
     </mc:Choice>
-    <mc:Fallback>
+    <mc:Fallback xmlns="">
       <p:transition spd="med">
         <p:fade/>
       </p:transition>
@@ -12630,13 +12630,13 @@
   <p:clrMapOvr>
     <a:masterClrMapping/>
   </p:clrMapOvr>
-  <mc:AlternateContent xmlns:mc="http://schemas.openxmlformats.org/markup-compatibility/2006">
-    <mc:Choice xmlns:p14="http://schemas.microsoft.com/office/powerpoint/2010/main" Requires="p14">
+  <mc:AlternateContent xmlns:mc="http://schemas.openxmlformats.org/markup-compatibility/2006" xmlns:p14="http://schemas.microsoft.com/office/powerpoint/2010/main">
+    <mc:Choice Requires="p14">
       <p:transition spd="med" p14:dur="700">
         <p:fade/>
       </p:transition>
     </mc:Choice>
-    <mc:Fallback>
+    <mc:Fallback xmlns="">
       <p:transition spd="med">
         <p:fade/>
       </p:transition>
@@ -13002,13 +13002,13 @@
   <p:clrMapOvr>
     <a:masterClrMapping/>
   </p:clrMapOvr>
-  <mc:AlternateContent xmlns:mc="http://schemas.openxmlformats.org/markup-compatibility/2006">
-    <mc:Choice xmlns:p14="http://schemas.microsoft.com/office/powerpoint/2010/main" Requires="p14">
+  <mc:AlternateContent xmlns:mc="http://schemas.openxmlformats.org/markup-compatibility/2006" xmlns:p14="http://schemas.microsoft.com/office/powerpoint/2010/main">
+    <mc:Choice Requires="p14">
       <p:transition spd="med" p14:dur="700">
         <p:fade/>
       </p:transition>
     </mc:Choice>
-    <mc:Fallback>
+    <mc:Fallback xmlns="">
       <p:transition spd="med">
         <p:fade/>
       </p:transition>
@@ -13149,13 +13149,13 @@
   <p:clrMapOvr>
     <a:masterClrMapping/>
   </p:clrMapOvr>
-  <mc:AlternateContent xmlns:mc="http://schemas.openxmlformats.org/markup-compatibility/2006">
-    <mc:Choice xmlns:p14="http://schemas.microsoft.com/office/powerpoint/2010/main" Requires="p14">
+  <mc:AlternateContent xmlns:mc="http://schemas.openxmlformats.org/markup-compatibility/2006" xmlns:p14="http://schemas.microsoft.com/office/powerpoint/2010/main">
+    <mc:Choice Requires="p14">
       <p:transition spd="med" p14:dur="700">
         <p:fade/>
       </p:transition>
     </mc:Choice>
-    <mc:Fallback>
+    <mc:Fallback xmlns="">
       <p:transition spd="med">
         <p:fade/>
       </p:transition>
@@ -13496,13 +13496,13 @@
   <p:clrMapOvr>
     <a:masterClrMapping/>
   </p:clrMapOvr>
-  <mc:AlternateContent xmlns:mc="http://schemas.openxmlformats.org/markup-compatibility/2006">
-    <mc:Choice xmlns:p14="http://schemas.microsoft.com/office/powerpoint/2010/main" Requires="p14">
+  <mc:AlternateContent xmlns:mc="http://schemas.openxmlformats.org/markup-compatibility/2006" xmlns:p14="http://schemas.microsoft.com/office/powerpoint/2010/main">
+    <mc:Choice Requires="p14">
       <p:transition spd="med" p14:dur="700">
         <p:fade/>
       </p:transition>
     </mc:Choice>
-    <mc:Fallback>
+    <mc:Fallback xmlns="">
       <p:transition spd="med">
         <p:fade/>
       </p:transition>
@@ -13690,13 +13690,13 @@
   <p:clrMapOvr>
     <a:masterClrMapping/>
   </p:clrMapOvr>
-  <mc:AlternateContent xmlns:mc="http://schemas.openxmlformats.org/markup-compatibility/2006">
-    <mc:Choice xmlns:p14="http://schemas.microsoft.com/office/powerpoint/2010/main" Requires="p14">
+  <mc:AlternateContent xmlns:mc="http://schemas.openxmlformats.org/markup-compatibility/2006" xmlns:p14="http://schemas.microsoft.com/office/powerpoint/2010/main">
+    <mc:Choice Requires="p14">
       <p:transition spd="med" p14:dur="700">
         <p:fade/>
       </p:transition>
     </mc:Choice>
-    <mc:Fallback>
+    <mc:Fallback xmlns="">
       <p:transition spd="med">
         <p:fade/>
       </p:transition>
@@ -15465,13 +15465,13 @@
   <p:clrMapOvr>
     <a:masterClrMapping/>
   </p:clrMapOvr>
-  <mc:AlternateContent xmlns:mc="http://schemas.openxmlformats.org/markup-compatibility/2006">
-    <mc:Choice xmlns:p14="http://schemas.microsoft.com/office/powerpoint/2010/main" Requires="p14">
+  <mc:AlternateContent xmlns:mc="http://schemas.openxmlformats.org/markup-compatibility/2006" xmlns:p14="http://schemas.microsoft.com/office/powerpoint/2010/main">
+    <mc:Choice Requires="p14">
       <p:transition spd="med" p14:dur="700">
         <p:fade/>
       </p:transition>
     </mc:Choice>
-    <mc:Fallback>
+    <mc:Fallback xmlns="">
       <p:transition spd="med">
         <p:fade/>
       </p:transition>
@@ -16307,13 +16307,13 @@
   <p:clrMapOvr>
     <a:masterClrMapping/>
   </p:clrMapOvr>
-  <mc:AlternateContent xmlns:mc="http://schemas.openxmlformats.org/markup-compatibility/2006">
-    <mc:Choice xmlns:p14="http://schemas.microsoft.com/office/powerpoint/2010/main" Requires="p14">
+  <mc:AlternateContent xmlns:mc="http://schemas.openxmlformats.org/markup-compatibility/2006" xmlns:p14="http://schemas.microsoft.com/office/powerpoint/2010/main">
+    <mc:Choice Requires="p14">
       <p:transition spd="med" p14:dur="700">
         <p:fade/>
       </p:transition>
     </mc:Choice>
-    <mc:Fallback>
+    <mc:Fallback xmlns="">
       <p:transition spd="med">
         <p:fade/>
       </p:transition>
